--- a/outputs/M.D._credit_risk_quant.pptx
+++ b/outputs/M.D._credit_risk_quant.pptx
@@ -3746,7 +3746,7 @@
                 </a:solidFill>
                 <a:latin typeface="Alegreya Sans"/>
               </a:rPr>
-              <a:t>EXPÉRIENCE PROFESSIONNELLE</a:t>
+              <a:t>PRINCIPALES EXPÉRIENCES PROFESSIONNELLES</a:t>
             </a:r>
           </a:p>
           <a:p>
@@ -4877,7 +4877,7 @@
                 </a:solidFill>
                 <a:latin typeface="Alegreya Sans"/>
               </a:rPr>
-              <a:t>PROFESSIONAL EXPERIENCE</a:t>
+              <a:t>MAIN PROFESSIONAL EXPERIENCE</a:t>
             </a:r>
           </a:p>
           <a:p>
